--- a/assets/files/jugyosha_slide.pptx
+++ b/assets/files/jugyosha_slide.pptx
@@ -1132,7 +1132,7 @@
           </a:p>
           <a:p>
             <a:r>
-              <a:t>本単元では、体積の変化と温度の変化を関係付けます。予想の根拠は、前の単元の既習、前の次の結論、生活経験の三つです。</a:t>
+              <a:t>本単元では、体積の変化と温度の変化を関係付けます。予想の根拠は、前の単元の既習、前の次で導きだした結論、生活経験の三つです。</a:t>
             </a:r>
           </a:p>
         </p:txBody>
@@ -1202,7 +1202,7 @@
           <a:lstStyle/>
           <a:p>
             <a:r>
-              <a:t>着眼１は、空気の結論から「物は、あたためると大きくなり、冷やすと小さくなるのではないか。でも、それは空気だけなのか、ほかの物もそうなのか」という問いを生み、第4時に1時間とって身の回りの物を考えることで、水だけでなく金属も調べようという追究の意欲を生む単元構成です。木や金属だけでなく、ほかの物を考えてもかまいません。</a:t>
+              <a:t>着眼１は、空気について導きだした結論から「物は、あたためると大きくなり、冷やすと小さくなるのではないか。でも、それは空気だけなのか、ほかの物もそうなのか」という問いを生み、第4時に1時間とって身の回りの物を考えることで、水だけでなく金属も調べようという追究の意欲を生む単元構成です。木や金属だけでなく、ほかの物を考えてもかまいません。</a:t>
             </a:r>
           </a:p>
           <a:p>
@@ -1282,7 +1282,7 @@
           </a:p>
           <a:p>
             <a:r>
-              <a:t>各次の結論が、次の次の予想の根拠になるように組んでいます。</a:t>
+              <a:t>各次で導きだした結論が、次の次の予想の根拠になるように組んでいます。</a:t>
             </a:r>
           </a:p>
         </p:txBody>
@@ -1352,7 +1352,7 @@
           <a:lstStyle/>
           <a:p>
             <a:r>
-              <a:t>空気の結論から「物は、あたためると大きくなり、冷やすと小さくなるのではないか」と考え、「それは空気だけなのか、ほかの物もそうなのか」という問いをもたせます。第4時に1時間とって身の回りの物を分けることで、水だけでなく金属も調べようという追究の意欲を生みます。木や金属だけでなく、ほかの物を考えてもかまいません。</a:t>
+              <a:t>空気について導きだした結論から「物は、あたためると大きくなり、冷やすと小さくなるのではないか」と考え、「それは空気だけなのか、ほかの物もそうなのか」という問いをもたせます。第4時に1時間とって身の回りの物を分けることで、水だけでなく金属も調べようという追究の意欲を生みます。木や金属だけでなく、ほかの物を考えてもかまいません。</a:t>
             </a:r>
           </a:p>
           <a:p>
@@ -29751,7 +29751,7 @@
         </p:nvGraphicFramePr>
         <p:xfrm>
           <a:off x="548640" y="1298448"/>
-          <a:ext cx="11091672" cy="3968496"/>
+          <a:ext cx="11091672" cy="4151376"/>
         </p:xfrm>
         <a:graphic>
           <a:graphicData uri="http://schemas.openxmlformats.org/drawingml/2006/table">
@@ -29959,7 +29959,7 @@
                           <a:latin typeface="BIZ UDゴシック"/>
                           <a:ea typeface="BIZ UDゴシック"/>
                         </a:rPr>
-                        <a:t>空気と水の結論や分類表と関係付け</a:t>
+                        <a:t>空気と水について導きだした結論や分類表と関係付け</a:t>
                       </a:r>
                     </a:p>
                     <a:p>
@@ -30004,7 +30004,7 @@
                   </a:tcPr>
                 </a:tc>
               </a:tr>
-              <a:tr h="841248">
+              <a:tr h="1024128">
                 <a:tc>
                   <a:txBody>
                     <a:bodyPr wrap="square"/>
@@ -30113,7 +30113,7 @@
                           <a:latin typeface="BIZ UDゴシック"/>
                           <a:ea typeface="BIZ UDゴシック"/>
                         </a:rPr>
-                        <a:t>空気や水の結論や生活経験と関係付けて根拠のある予想を発想し</a:t>
+                        <a:t>空気や水について導きだした結論や生活経験と関係付けて</a:t>
                       </a:r>
                     </a:p>
                     <a:p>
@@ -30130,7 +30130,7 @@
                           <a:latin typeface="BIZ UDゴシック"/>
                           <a:ea typeface="BIZ UDゴシック"/>
                         </a:rPr>
-                        <a:t>「大きくなるなら あたためた玉は輪を通らなくなるはず」と</a:t>
+                        <a:t>根拠のある予想を発想し「大きくなるなら あたためた玉は</a:t>
                       </a:r>
                     </a:p>
                     <a:p>
@@ -30147,7 +30147,24 @@
                           <a:latin typeface="BIZ UDゴシック"/>
                           <a:ea typeface="BIZ UDゴシック"/>
                         </a:rPr>
-                        <a:t>結果を見通して 同じ方法で調べる計画を立てている</a:t>
+                        <a:t>輪を通らなくなるはず」と結果を見通して 同じ方法で調べる</a:t>
+                      </a:r>
+                    </a:p>
+                    <a:p>
+                      <a:pPr>
+                        <a:lnSpc>
+                          <a:spcPct val="108000"/>
+                        </a:lnSpc>
+                      </a:pPr>
+                      <a:r>
+                        <a:rPr sz="1350" b="0">
+                          <a:solidFill>
+                            <a:srgbClr val="1F2328"/>
+                          </a:solidFill>
+                          <a:latin typeface="BIZ UDゴシック"/>
+                          <a:ea typeface="BIZ UDゴシック"/>
+                        </a:rPr>
+                        <a:t>計画を立てている</a:t>
                       </a:r>
                     </a:p>
                   </a:txBody>
@@ -30421,7 +30438,7 @@
                           <a:latin typeface="BIZ UDゴシック"/>
                           <a:ea typeface="BIZ UDゴシック"/>
                         </a:rPr>
-                        <a:t>冷やすと小さくなる」という妥当な結論を導き出し 表現している</a:t>
+                        <a:t>冷やすと小さくなる」という妥当な結論を導きだし 表現している</a:t>
                       </a:r>
                     </a:p>
                   </a:txBody>
@@ -30564,7 +30581,7 @@
         </p:nvSpPr>
         <p:spPr>
           <a:xfrm>
-            <a:off x="566928" y="5349240"/>
+            <a:off x="566928" y="5577840"/>
             <a:ext cx="1182370" cy="310896"/>
           </a:xfrm>
           <a:prstGeom prst="roundRect">
@@ -30610,7 +30627,7 @@
         </p:nvSpPr>
         <p:spPr>
           <a:xfrm>
-            <a:off x="566928" y="5340096"/>
+            <a:off x="566928" y="5568696"/>
             <a:ext cx="1182370" cy="329184"/>
           </a:xfrm>
           <a:prstGeom prst="rect">
@@ -30650,7 +30667,7 @@
         </p:nvSpPr>
         <p:spPr>
           <a:xfrm>
-            <a:off x="2011680" y="5321808"/>
+            <a:off x="2011680" y="5550408"/>
             <a:ext cx="9601200" cy="329184"/>
           </a:xfrm>
           <a:prstGeom prst="rect">
